--- a/docs/songs/my lighthouse.pptx
+++ b/docs/songs/my lighthouse.pptx
@@ -6,11 +6,13 @@
   </p:sldMasterIdLst>
   <p:sldIdLst>
     <p:sldId id="518" r:id="rId2"/>
-    <p:sldId id="520" r:id="rId3"/>
-    <p:sldId id="521" r:id="rId4"/>
-    <p:sldId id="522" r:id="rId5"/>
-    <p:sldId id="523" r:id="rId6"/>
-    <p:sldId id="524" r:id="rId7"/>
+    <p:sldId id="460" r:id="rId3"/>
+    <p:sldId id="525" r:id="rId4"/>
+    <p:sldId id="526" r:id="rId5"/>
+    <p:sldId id="527" r:id="rId6"/>
+    <p:sldId id="528" r:id="rId7"/>
+    <p:sldId id="529" r:id="rId8"/>
+    <p:sldId id="530" r:id="rId9"/>
   </p:sldIdLst>
   <p:sldSz cx="9144000" cy="6858000" type="screen4x3"/>
   <p:notesSz cx="6858000" cy="9144000"/>
@@ -310,7 +312,7 @@
             <a:fld id="{26EA1CF3-4A15-4CBF-9A5A-6A56C368BE71}" type="datetimeFigureOut">
               <a:rPr lang="en-GB" smtClean="0"/>
               <a:pPr/>
-              <a:t>14/11/2022</a:t>
+              <a:t>06/07/2026</a:t>
             </a:fld>
             <a:endParaRPr lang="en-GB"/>
           </a:p>
@@ -477,7 +479,7 @@
             <a:fld id="{26EA1CF3-4A15-4CBF-9A5A-6A56C368BE71}" type="datetimeFigureOut">
               <a:rPr lang="en-GB" smtClean="0"/>
               <a:pPr/>
-              <a:t>14/11/2022</a:t>
+              <a:t>06/07/2026</a:t>
             </a:fld>
             <a:endParaRPr lang="en-GB"/>
           </a:p>
@@ -654,7 +656,7 @@
             <a:fld id="{26EA1CF3-4A15-4CBF-9A5A-6A56C368BE71}" type="datetimeFigureOut">
               <a:rPr lang="en-GB" smtClean="0"/>
               <a:pPr/>
-              <a:t>14/11/2022</a:t>
+              <a:t>06/07/2026</a:t>
             </a:fld>
             <a:endParaRPr lang="en-GB"/>
           </a:p>
@@ -821,7 +823,7 @@
             <a:fld id="{26EA1CF3-4A15-4CBF-9A5A-6A56C368BE71}" type="datetimeFigureOut">
               <a:rPr lang="en-GB" smtClean="0"/>
               <a:pPr/>
-              <a:t>14/11/2022</a:t>
+              <a:t>06/07/2026</a:t>
             </a:fld>
             <a:endParaRPr lang="en-GB"/>
           </a:p>
@@ -1064,7 +1066,7 @@
             <a:fld id="{26EA1CF3-4A15-4CBF-9A5A-6A56C368BE71}" type="datetimeFigureOut">
               <a:rPr lang="en-GB" smtClean="0"/>
               <a:pPr/>
-              <a:t>14/11/2022</a:t>
+              <a:t>06/07/2026</a:t>
             </a:fld>
             <a:endParaRPr lang="en-GB"/>
           </a:p>
@@ -1349,7 +1351,7 @@
             <a:fld id="{26EA1CF3-4A15-4CBF-9A5A-6A56C368BE71}" type="datetimeFigureOut">
               <a:rPr lang="en-GB" smtClean="0"/>
               <a:pPr/>
-              <a:t>14/11/2022</a:t>
+              <a:t>06/07/2026</a:t>
             </a:fld>
             <a:endParaRPr lang="en-GB"/>
           </a:p>
@@ -1768,7 +1770,7 @@
             <a:fld id="{26EA1CF3-4A15-4CBF-9A5A-6A56C368BE71}" type="datetimeFigureOut">
               <a:rPr lang="en-GB" smtClean="0"/>
               <a:pPr/>
-              <a:t>14/11/2022</a:t>
+              <a:t>06/07/2026</a:t>
             </a:fld>
             <a:endParaRPr lang="en-GB"/>
           </a:p>
@@ -1883,7 +1885,7 @@
             <a:fld id="{26EA1CF3-4A15-4CBF-9A5A-6A56C368BE71}" type="datetimeFigureOut">
               <a:rPr lang="en-GB" smtClean="0"/>
               <a:pPr/>
-              <a:t>14/11/2022</a:t>
+              <a:t>06/07/2026</a:t>
             </a:fld>
             <a:endParaRPr lang="en-GB"/>
           </a:p>
@@ -1975,7 +1977,7 @@
             <a:fld id="{26EA1CF3-4A15-4CBF-9A5A-6A56C368BE71}" type="datetimeFigureOut">
               <a:rPr lang="en-GB" smtClean="0"/>
               <a:pPr/>
-              <a:t>14/11/2022</a:t>
+              <a:t>06/07/2026</a:t>
             </a:fld>
             <a:endParaRPr lang="en-GB"/>
           </a:p>
@@ -2249,7 +2251,7 @@
             <a:fld id="{26EA1CF3-4A15-4CBF-9A5A-6A56C368BE71}" type="datetimeFigureOut">
               <a:rPr lang="en-GB" smtClean="0"/>
               <a:pPr/>
-              <a:t>14/11/2022</a:t>
+              <a:t>06/07/2026</a:t>
             </a:fld>
             <a:endParaRPr lang="en-GB"/>
           </a:p>
@@ -2499,7 +2501,7 @@
             <a:fld id="{26EA1CF3-4A15-4CBF-9A5A-6A56C368BE71}" type="datetimeFigureOut">
               <a:rPr lang="en-GB" smtClean="0"/>
               <a:pPr/>
-              <a:t>14/11/2022</a:t>
+              <a:t>06/07/2026</a:t>
             </a:fld>
             <a:endParaRPr lang="en-GB"/>
           </a:p>
@@ -2712,7 +2714,7 @@
             <a:fld id="{26EA1CF3-4A15-4CBF-9A5A-6A56C368BE71}" type="datetimeFigureOut">
               <a:rPr lang="en-GB" smtClean="0"/>
               <a:pPr/>
-              <a:t>14/11/2022</a:t>
+              <a:t>06/07/2026</a:t>
             </a:fld>
             <a:endParaRPr lang="en-GB"/>
           </a:p>
@@ -3250,7 +3252,13 @@
   <p:cSld>
     <p:spTree>
       <p:nvGrpSpPr>
-        <p:cNvPr id="1" name=""/>
+        <p:cNvPr id="1" name="">
+          <a:extLst>
+            <a:ext uri="{FF2B5EF4-FFF2-40B4-BE49-F238E27FC236}">
+              <a16:creationId xmlns:a16="http://schemas.microsoft.com/office/drawing/2014/main" id="{B230C18D-98C9-AEDA-F90F-C4266ADC1BF6}"/>
+            </a:ext>
+          </a:extLst>
+        </p:cNvPr>
         <p:cNvGrpSpPr/>
         <p:nvPr/>
       </p:nvGrpSpPr>
@@ -3264,7 +3272,13 @@
       </p:grpSpPr>
       <p:sp>
         <p:nvSpPr>
-          <p:cNvPr id="3" name="Subtitle 2"/>
+          <p:cNvPr id="3" name="Subtitle 2">
+            <a:extLst>
+              <a:ext uri="{FF2B5EF4-FFF2-40B4-BE49-F238E27FC236}">
+                <a16:creationId xmlns:a16="http://schemas.microsoft.com/office/drawing/2014/main" id="{32AE24CE-6ADE-B2DE-EAAD-DCD1859E96D9}"/>
+              </a:ext>
+            </a:extLst>
+          </p:cNvPr>
           <p:cNvSpPr>
             <a:spLocks noGrp="1"/>
           </p:cNvSpPr>
@@ -3274,7 +3288,7 @@
         </p:nvSpPr>
         <p:spPr>
           <a:xfrm>
-            <a:off x="323528" y="188640"/>
+            <a:off x="203118" y="692696"/>
             <a:ext cx="8640960" cy="6480720"/>
           </a:xfrm>
         </p:spPr>
@@ -3285,7 +3299,7 @@
           <a:lstStyle/>
           <a:p>
             <a:r>
-              <a:rPr lang="en-GB" sz="4000" dirty="0">
+              <a:rPr lang="en-GB" sz="3600" dirty="0">
                 <a:solidFill>
                   <a:schemeClr val="bg1"/>
                 </a:solidFill>
@@ -3295,7 +3309,7 @@
           </a:p>
           <a:p>
             <a:r>
-              <a:rPr lang="en-GB" sz="4000" dirty="0">
+              <a:rPr lang="en-GB" sz="3600" dirty="0">
                 <a:solidFill>
                   <a:schemeClr val="bg1"/>
                 </a:solidFill>
@@ -3305,7 +3319,7 @@
           </a:p>
           <a:p>
             <a:r>
-              <a:rPr lang="en-GB" sz="4000" dirty="0">
+              <a:rPr lang="en-GB" sz="3600" dirty="0">
                 <a:solidFill>
                   <a:schemeClr val="bg1"/>
                 </a:solidFill>
@@ -3315,7 +3329,7 @@
           </a:p>
           <a:p>
             <a:r>
-              <a:rPr lang="en-GB" sz="4000" dirty="0">
+              <a:rPr lang="en-GB" sz="3600" dirty="0">
                 <a:solidFill>
                   <a:schemeClr val="bg1"/>
                 </a:solidFill>
@@ -3325,7 +3339,7 @@
           </a:p>
           <a:p>
             <a:r>
-              <a:rPr lang="en-GB" sz="4000" dirty="0">
+              <a:rPr lang="en-GB" sz="3600" dirty="0">
                 <a:solidFill>
                   <a:schemeClr val="bg1"/>
                 </a:solidFill>
@@ -3333,17 +3347,30 @@
               <a:t>You are the peace in my troubled sea</a:t>
             </a:r>
           </a:p>
-        </p:txBody>
-      </p:sp>
-      <p:sp>
-        <p:nvSpPr>
-          <p:cNvPr id="4" name="TextBox 3"/>
+          <a:p>
+            <a:endParaRPr lang="en-GB" sz="3600" dirty="0">
+              <a:solidFill>
+                <a:schemeClr val="bg1"/>
+              </a:solidFill>
+            </a:endParaRPr>
+          </a:p>
+        </p:txBody>
+      </p:sp>
+      <p:sp>
+        <p:nvSpPr>
+          <p:cNvPr id="4" name="TextBox 3">
+            <a:extLst>
+              <a:ext uri="{FF2B5EF4-FFF2-40B4-BE49-F238E27FC236}">
+                <a16:creationId xmlns:a16="http://schemas.microsoft.com/office/drawing/2014/main" id="{E0FD1BAD-6226-C339-2A9E-473F9BE02B66}"/>
+              </a:ext>
+            </a:extLst>
+          </p:cNvPr>
           <p:cNvSpPr txBox="1"/>
           <p:nvPr/>
         </p:nvSpPr>
         <p:spPr>
           <a:xfrm>
-            <a:off x="8529729" y="0"/>
+            <a:off x="8388424" y="-3388"/>
             <a:ext cx="628698" cy="461665"/>
           </a:xfrm>
           <a:prstGeom prst="rect">
@@ -3363,7 +3390,7 @@
                   <a:schemeClr val="bg1"/>
                 </a:solidFill>
               </a:rPr>
-              <a:t>1/5</a:t>
+              <a:t>1/7</a:t>
             </a:r>
           </a:p>
         </p:txBody>
@@ -3371,7 +3398,7 @@
     </p:spTree>
     <p:extLst>
       <p:ext uri="{BB962C8B-B14F-4D97-AF65-F5344CB8AC3E}">
-        <p14:creationId xmlns:p14="http://schemas.microsoft.com/office/powerpoint/2010/main" val="2175635830"/>
+        <p14:creationId xmlns:p14="http://schemas.microsoft.com/office/powerpoint/2010/main" val="4003699584"/>
       </p:ext>
     </p:extLst>
   </p:cSld>
@@ -3386,7 +3413,13 @@
   <p:cSld>
     <p:spTree>
       <p:nvGrpSpPr>
-        <p:cNvPr id="1" name=""/>
+        <p:cNvPr id="1" name="">
+          <a:extLst>
+            <a:ext uri="{FF2B5EF4-FFF2-40B4-BE49-F238E27FC236}">
+              <a16:creationId xmlns:a16="http://schemas.microsoft.com/office/drawing/2014/main" id="{9C3E5F74-2040-3002-8DF3-D48C5F5D541C}"/>
+            </a:ext>
+          </a:extLst>
+        </p:cNvPr>
         <p:cNvGrpSpPr/>
         <p:nvPr/>
       </p:nvGrpSpPr>
@@ -3400,7 +3433,13 @@
       </p:grpSpPr>
       <p:sp>
         <p:nvSpPr>
-          <p:cNvPr id="3" name="Subtitle 2"/>
+          <p:cNvPr id="3" name="Subtitle 2">
+            <a:extLst>
+              <a:ext uri="{FF2B5EF4-FFF2-40B4-BE49-F238E27FC236}">
+                <a16:creationId xmlns:a16="http://schemas.microsoft.com/office/drawing/2014/main" id="{AA9F3654-9E7B-BB58-26EC-338C14BEE421}"/>
+              </a:ext>
+            </a:extLst>
+          </p:cNvPr>
           <p:cNvSpPr>
             <a:spLocks noGrp="1"/>
           </p:cNvSpPr>
@@ -3410,7 +3449,7 @@
         </p:nvSpPr>
         <p:spPr>
           <a:xfrm>
-            <a:off x="323528" y="188640"/>
+            <a:off x="203118" y="692696"/>
             <a:ext cx="8640960" cy="6480720"/>
           </a:xfrm>
         </p:spPr>
@@ -3421,7 +3460,7 @@
           <a:lstStyle/>
           <a:p>
             <a:r>
-              <a:rPr lang="en-GB" sz="4000" dirty="0">
+              <a:rPr lang="en-GB" sz="3600" dirty="0">
                 <a:solidFill>
                   <a:schemeClr val="bg1"/>
                 </a:solidFill>
@@ -3431,7 +3470,7 @@
           </a:p>
           <a:p>
             <a:r>
-              <a:rPr lang="en-GB" sz="4000" dirty="0">
+              <a:rPr lang="en-GB" sz="3600" dirty="0">
                 <a:solidFill>
                   <a:schemeClr val="bg1"/>
                 </a:solidFill>
@@ -3441,7 +3480,7 @@
           </a:p>
           <a:p>
             <a:r>
-              <a:rPr lang="en-GB" sz="4000" dirty="0">
+              <a:rPr lang="en-GB" sz="3600" dirty="0">
                 <a:solidFill>
                   <a:schemeClr val="bg1"/>
                 </a:solidFill>
@@ -3451,7 +3490,7 @@
           </a:p>
           <a:p>
             <a:r>
-              <a:rPr lang="en-GB" sz="4000" dirty="0">
+              <a:rPr lang="en-GB" sz="3600" dirty="0">
                 <a:solidFill>
                   <a:schemeClr val="bg1"/>
                 </a:solidFill>
@@ -3461,7 +3500,7 @@
           </a:p>
           <a:p>
             <a:r>
-              <a:rPr lang="en-GB" sz="4000" dirty="0">
+              <a:rPr lang="en-GB" sz="3600" dirty="0">
                 <a:solidFill>
                   <a:schemeClr val="bg1"/>
                 </a:solidFill>
@@ -3469,17 +3508,30 @@
               <a:t>You are the peace in my troubled sea</a:t>
             </a:r>
           </a:p>
-        </p:txBody>
-      </p:sp>
-      <p:sp>
-        <p:nvSpPr>
-          <p:cNvPr id="4" name="TextBox 3"/>
+          <a:p>
+            <a:endParaRPr lang="en-GB" sz="3600" dirty="0">
+              <a:solidFill>
+                <a:schemeClr val="bg1"/>
+              </a:solidFill>
+            </a:endParaRPr>
+          </a:p>
+        </p:txBody>
+      </p:sp>
+      <p:sp>
+        <p:nvSpPr>
+          <p:cNvPr id="4" name="TextBox 3">
+            <a:extLst>
+              <a:ext uri="{FF2B5EF4-FFF2-40B4-BE49-F238E27FC236}">
+                <a16:creationId xmlns:a16="http://schemas.microsoft.com/office/drawing/2014/main" id="{8057211E-CD31-359C-1FF4-D085D0B22285}"/>
+              </a:ext>
+            </a:extLst>
+          </p:cNvPr>
           <p:cNvSpPr txBox="1"/>
           <p:nvPr/>
         </p:nvSpPr>
         <p:spPr>
           <a:xfrm>
-            <a:off x="8529729" y="0"/>
+            <a:off x="8388424" y="-3388"/>
             <a:ext cx="628698" cy="461665"/>
           </a:xfrm>
           <a:prstGeom prst="rect">
@@ -3499,7 +3551,7 @@
                   <a:schemeClr val="bg1"/>
                 </a:solidFill>
               </a:rPr>
-              <a:t>2/5</a:t>
+              <a:t>2/7</a:t>
             </a:r>
           </a:p>
         </p:txBody>
@@ -3507,7 +3559,7 @@
     </p:spTree>
     <p:extLst>
       <p:ext uri="{BB962C8B-B14F-4D97-AF65-F5344CB8AC3E}">
-        <p14:creationId xmlns:p14="http://schemas.microsoft.com/office/powerpoint/2010/main" val="2724196499"/>
+        <p14:creationId xmlns:p14="http://schemas.microsoft.com/office/powerpoint/2010/main" val="4154396011"/>
       </p:ext>
     </p:extLst>
   </p:cSld>
@@ -3522,7 +3574,13 @@
   <p:cSld>
     <p:spTree>
       <p:nvGrpSpPr>
-        <p:cNvPr id="1" name=""/>
+        <p:cNvPr id="1" name="">
+          <a:extLst>
+            <a:ext uri="{FF2B5EF4-FFF2-40B4-BE49-F238E27FC236}">
+              <a16:creationId xmlns:a16="http://schemas.microsoft.com/office/drawing/2014/main" id="{7F0B463B-A6B3-F369-DC6F-7E6BB76D86CD}"/>
+            </a:ext>
+          </a:extLst>
+        </p:cNvPr>
         <p:cNvGrpSpPr/>
         <p:nvPr/>
       </p:nvGrpSpPr>
@@ -3536,7 +3594,13 @@
       </p:grpSpPr>
       <p:sp>
         <p:nvSpPr>
-          <p:cNvPr id="3" name="Subtitle 2"/>
+          <p:cNvPr id="3" name="Subtitle 2">
+            <a:extLst>
+              <a:ext uri="{FF2B5EF4-FFF2-40B4-BE49-F238E27FC236}">
+                <a16:creationId xmlns:a16="http://schemas.microsoft.com/office/drawing/2014/main" id="{D39CD891-75CC-7035-49C0-F39198A8003C}"/>
+              </a:ext>
+            </a:extLst>
+          </p:cNvPr>
           <p:cNvSpPr>
             <a:spLocks noGrp="1"/>
           </p:cNvSpPr>
@@ -3546,7 +3610,7 @@
         </p:nvSpPr>
         <p:spPr>
           <a:xfrm>
-            <a:off x="323528" y="188640"/>
+            <a:off x="203118" y="692696"/>
             <a:ext cx="8640960" cy="6480720"/>
           </a:xfrm>
         </p:spPr>
@@ -3557,7 +3621,7 @@
           <a:lstStyle/>
           <a:p>
             <a:r>
-              <a:rPr lang="en-GB" sz="4000" dirty="0">
+              <a:rPr lang="en-GB" sz="3600" dirty="0">
                 <a:solidFill>
                   <a:schemeClr val="bg1"/>
                 </a:solidFill>
@@ -3567,7 +3631,7 @@
           </a:p>
           <a:p>
             <a:r>
-              <a:rPr lang="en-GB" sz="4000" dirty="0">
+              <a:rPr lang="en-GB" sz="3600" dirty="0">
                 <a:solidFill>
                   <a:schemeClr val="bg1"/>
                 </a:solidFill>
@@ -3577,7 +3641,7 @@
           </a:p>
           <a:p>
             <a:r>
-              <a:rPr lang="en-GB" sz="4000" dirty="0">
+              <a:rPr lang="en-GB" sz="3600" dirty="0">
                 <a:solidFill>
                   <a:schemeClr val="bg1"/>
                 </a:solidFill>
@@ -3587,7 +3651,7 @@
           </a:p>
           <a:p>
             <a:r>
-              <a:rPr lang="en-GB" sz="4000" dirty="0">
+              <a:rPr lang="en-GB" sz="3600" dirty="0">
                 <a:solidFill>
                   <a:schemeClr val="bg1"/>
                 </a:solidFill>
@@ -3597,7 +3661,7 @@
           </a:p>
           <a:p>
             <a:r>
-              <a:rPr lang="en-GB" sz="4000" dirty="0">
+              <a:rPr lang="en-GB" sz="3600" dirty="0">
                 <a:solidFill>
                   <a:schemeClr val="bg1"/>
                 </a:solidFill>
@@ -3607,7 +3671,7 @@
           </a:p>
           <a:p>
             <a:r>
-              <a:rPr lang="en-GB" sz="4000" dirty="0">
+              <a:rPr lang="en-GB" sz="3600" dirty="0">
                 <a:solidFill>
                   <a:schemeClr val="bg1"/>
                 </a:solidFill>
@@ -3617,7 +3681,7 @@
           </a:p>
           <a:p>
             <a:r>
-              <a:rPr lang="en-GB" sz="4000" dirty="0">
+              <a:rPr lang="en-GB" sz="3600" dirty="0">
                 <a:solidFill>
                   <a:schemeClr val="bg1"/>
                 </a:solidFill>
@@ -3625,17 +3689,30 @@
               <a:t>Safe to shore safe to shore safe to shore</a:t>
             </a:r>
           </a:p>
-        </p:txBody>
-      </p:sp>
-      <p:sp>
-        <p:nvSpPr>
-          <p:cNvPr id="4" name="TextBox 3"/>
+          <a:p>
+            <a:endParaRPr lang="en-GB" sz="3600" dirty="0">
+              <a:solidFill>
+                <a:schemeClr val="bg1"/>
+              </a:solidFill>
+            </a:endParaRPr>
+          </a:p>
+        </p:txBody>
+      </p:sp>
+      <p:sp>
+        <p:nvSpPr>
+          <p:cNvPr id="4" name="TextBox 3">
+            <a:extLst>
+              <a:ext uri="{FF2B5EF4-FFF2-40B4-BE49-F238E27FC236}">
+                <a16:creationId xmlns:a16="http://schemas.microsoft.com/office/drawing/2014/main" id="{3F1463DE-5D83-24D6-D791-7BE1F2D0A1E6}"/>
+              </a:ext>
+            </a:extLst>
+          </p:cNvPr>
           <p:cNvSpPr txBox="1"/>
           <p:nvPr/>
         </p:nvSpPr>
         <p:spPr>
           <a:xfrm>
-            <a:off x="8529729" y="0"/>
+            <a:off x="8388424" y="-3388"/>
             <a:ext cx="628698" cy="461665"/>
           </a:xfrm>
           <a:prstGeom prst="rect">
@@ -3655,7 +3732,7 @@
                   <a:schemeClr val="bg1"/>
                 </a:solidFill>
               </a:rPr>
-              <a:t>3/5</a:t>
+              <a:t>3/7</a:t>
             </a:r>
           </a:p>
         </p:txBody>
@@ -3663,7 +3740,7 @@
     </p:spTree>
     <p:extLst>
       <p:ext uri="{BB962C8B-B14F-4D97-AF65-F5344CB8AC3E}">
-        <p14:creationId xmlns:p14="http://schemas.microsoft.com/office/powerpoint/2010/main" val="2978235422"/>
+        <p14:creationId xmlns:p14="http://schemas.microsoft.com/office/powerpoint/2010/main" val="1297923318"/>
       </p:ext>
     </p:extLst>
   </p:cSld>
@@ -3678,7 +3755,13 @@
   <p:cSld>
     <p:spTree>
       <p:nvGrpSpPr>
-        <p:cNvPr id="1" name=""/>
+        <p:cNvPr id="1" name="">
+          <a:extLst>
+            <a:ext uri="{FF2B5EF4-FFF2-40B4-BE49-F238E27FC236}">
+              <a16:creationId xmlns:a16="http://schemas.microsoft.com/office/drawing/2014/main" id="{F4924DDD-72EA-44C4-0FAA-6FB7976F34F9}"/>
+            </a:ext>
+          </a:extLst>
+        </p:cNvPr>
         <p:cNvGrpSpPr/>
         <p:nvPr/>
       </p:nvGrpSpPr>
@@ -3692,7 +3775,13 @@
       </p:grpSpPr>
       <p:sp>
         <p:nvSpPr>
-          <p:cNvPr id="3" name="Subtitle 2"/>
+          <p:cNvPr id="3" name="Subtitle 2">
+            <a:extLst>
+              <a:ext uri="{FF2B5EF4-FFF2-40B4-BE49-F238E27FC236}">
+                <a16:creationId xmlns:a16="http://schemas.microsoft.com/office/drawing/2014/main" id="{B6D552DE-DF46-E330-52B2-A6EA007CCF57}"/>
+              </a:ext>
+            </a:extLst>
+          </p:cNvPr>
           <p:cNvSpPr>
             <a:spLocks noGrp="1"/>
           </p:cNvSpPr>
@@ -3702,7 +3791,7 @@
         </p:nvSpPr>
         <p:spPr>
           <a:xfrm>
-            <a:off x="323528" y="188640"/>
+            <a:off x="203118" y="692696"/>
             <a:ext cx="8640960" cy="6480720"/>
           </a:xfrm>
         </p:spPr>
@@ -3713,7 +3802,7 @@
           <a:lstStyle/>
           <a:p>
             <a:r>
-              <a:rPr lang="en-GB" sz="4000" dirty="0">
+              <a:rPr lang="en-GB" sz="3600" dirty="0">
                 <a:solidFill>
                   <a:schemeClr val="bg1"/>
                 </a:solidFill>
@@ -3723,7 +3812,7 @@
           </a:p>
           <a:p>
             <a:r>
-              <a:rPr lang="en-GB" sz="4000" dirty="0">
+              <a:rPr lang="en-GB" sz="3600" dirty="0">
                 <a:solidFill>
                   <a:schemeClr val="bg1"/>
                 </a:solidFill>
@@ -3733,7 +3822,7 @@
           </a:p>
           <a:p>
             <a:r>
-              <a:rPr lang="en-GB" sz="4000" dirty="0">
+              <a:rPr lang="en-GB" sz="3600" dirty="0">
                 <a:solidFill>
                   <a:schemeClr val="bg1"/>
                 </a:solidFill>
@@ -3743,7 +3832,7 @@
           </a:p>
           <a:p>
             <a:r>
-              <a:rPr lang="en-GB" sz="4000" dirty="0">
+              <a:rPr lang="en-GB" sz="3600" dirty="0">
                 <a:solidFill>
                   <a:schemeClr val="bg1"/>
                 </a:solidFill>
@@ -3753,7 +3842,7 @@
           </a:p>
           <a:p>
             <a:r>
-              <a:rPr lang="en-GB" sz="4000" dirty="0">
+              <a:rPr lang="en-GB" sz="3600" dirty="0">
                 <a:solidFill>
                   <a:schemeClr val="bg1"/>
                 </a:solidFill>
@@ -3761,17 +3850,30 @@
               <a:t>You are the peace in my troubled sea</a:t>
             </a:r>
           </a:p>
-        </p:txBody>
-      </p:sp>
-      <p:sp>
-        <p:nvSpPr>
-          <p:cNvPr id="4" name="TextBox 3"/>
+          <a:p>
+            <a:endParaRPr lang="en-GB" sz="3600" dirty="0">
+              <a:solidFill>
+                <a:schemeClr val="bg1"/>
+              </a:solidFill>
+            </a:endParaRPr>
+          </a:p>
+        </p:txBody>
+      </p:sp>
+      <p:sp>
+        <p:nvSpPr>
+          <p:cNvPr id="4" name="TextBox 3">
+            <a:extLst>
+              <a:ext uri="{FF2B5EF4-FFF2-40B4-BE49-F238E27FC236}">
+                <a16:creationId xmlns:a16="http://schemas.microsoft.com/office/drawing/2014/main" id="{5A527DA9-77B4-3828-7CDE-B05FC847A90A}"/>
+              </a:ext>
+            </a:extLst>
+          </p:cNvPr>
           <p:cNvSpPr txBox="1"/>
           <p:nvPr/>
         </p:nvSpPr>
         <p:spPr>
           <a:xfrm>
-            <a:off x="8529729" y="0"/>
+            <a:off x="8388424" y="-3388"/>
             <a:ext cx="628698" cy="461665"/>
           </a:xfrm>
           <a:prstGeom prst="rect">
@@ -3791,7 +3893,7 @@
                   <a:schemeClr val="bg1"/>
                 </a:solidFill>
               </a:rPr>
-              <a:t>4/5</a:t>
+              <a:t>4/7</a:t>
             </a:r>
           </a:p>
         </p:txBody>
@@ -3799,7 +3901,7 @@
     </p:spTree>
     <p:extLst>
       <p:ext uri="{BB962C8B-B14F-4D97-AF65-F5344CB8AC3E}">
-        <p14:creationId xmlns:p14="http://schemas.microsoft.com/office/powerpoint/2010/main" val="3989692798"/>
+        <p14:creationId xmlns:p14="http://schemas.microsoft.com/office/powerpoint/2010/main" val="1550327008"/>
       </p:ext>
     </p:extLst>
   </p:cSld>
@@ -3814,7 +3916,13 @@
   <p:cSld>
     <p:spTree>
       <p:nvGrpSpPr>
-        <p:cNvPr id="1" name=""/>
+        <p:cNvPr id="1" name="">
+          <a:extLst>
+            <a:ext uri="{FF2B5EF4-FFF2-40B4-BE49-F238E27FC236}">
+              <a16:creationId xmlns:a16="http://schemas.microsoft.com/office/drawing/2014/main" id="{E58A5147-C018-0CF4-3CFA-6A0A0ADD0DD7}"/>
+            </a:ext>
+          </a:extLst>
+        </p:cNvPr>
         <p:cNvGrpSpPr/>
         <p:nvPr/>
       </p:nvGrpSpPr>
@@ -3828,7 +3936,13 @@
       </p:grpSpPr>
       <p:sp>
         <p:nvSpPr>
-          <p:cNvPr id="3" name="Subtitle 2"/>
+          <p:cNvPr id="3" name="Subtitle 2">
+            <a:extLst>
+              <a:ext uri="{FF2B5EF4-FFF2-40B4-BE49-F238E27FC236}">
+                <a16:creationId xmlns:a16="http://schemas.microsoft.com/office/drawing/2014/main" id="{156C9A58-6B6A-8673-BCAA-C0BD17E55F45}"/>
+              </a:ext>
+            </a:extLst>
+          </p:cNvPr>
           <p:cNvSpPr>
             <a:spLocks noGrp="1"/>
           </p:cNvSpPr>
@@ -3838,7 +3952,7 @@
         </p:nvSpPr>
         <p:spPr>
           <a:xfrm>
-            <a:off x="323528" y="188640"/>
+            <a:off x="203118" y="692696"/>
             <a:ext cx="8640960" cy="6480720"/>
           </a:xfrm>
         </p:spPr>
@@ -3849,65 +3963,98 @@
           <a:lstStyle/>
           <a:p>
             <a:r>
-              <a:rPr lang="en-GB" sz="4000" dirty="0">
-                <a:solidFill>
-                  <a:schemeClr val="bg1"/>
-                </a:solidFill>
-              </a:rPr>
-              <a:t>Fire before us</a:t>
-            </a:r>
-          </a:p>
-          <a:p>
-            <a:r>
-              <a:rPr lang="en-GB" sz="4000" dirty="0">
-                <a:solidFill>
-                  <a:schemeClr val="bg1"/>
-                </a:solidFill>
-              </a:rPr>
-              <a:t>You're the brightest</a:t>
-            </a:r>
-          </a:p>
-          <a:p>
-            <a:r>
-              <a:rPr lang="en-GB" sz="4000" dirty="0">
-                <a:solidFill>
-                  <a:schemeClr val="bg1"/>
-                </a:solidFill>
-              </a:rPr>
-              <a:t>You will lead us</a:t>
-            </a:r>
-          </a:p>
-          <a:p>
-            <a:r>
-              <a:rPr lang="en-GB" sz="4000" dirty="0">
-                <a:solidFill>
-                  <a:schemeClr val="bg1"/>
-                </a:solidFill>
-              </a:rPr>
-              <a:t>Through the storms (hey)</a:t>
-            </a:r>
-          </a:p>
-          <a:p>
-            <a:r>
-              <a:rPr lang="en-GB" sz="4000" dirty="0">
-                <a:solidFill>
-                  <a:schemeClr val="bg1"/>
-                </a:solidFill>
-              </a:rPr>
-              <a:t>(REPEAT)</a:t>
-            </a:r>
-          </a:p>
-        </p:txBody>
-      </p:sp>
-      <p:sp>
-        <p:nvSpPr>
-          <p:cNvPr id="4" name="TextBox 3"/>
+              <a:rPr lang="en-GB" sz="3600" dirty="0">
+                <a:solidFill>
+                  <a:schemeClr val="bg1"/>
+                </a:solidFill>
+              </a:rPr>
+              <a:t>My Lighthouse my Lighthouse</a:t>
+            </a:r>
+          </a:p>
+          <a:p>
+            <a:r>
+              <a:rPr lang="en-GB" sz="3600" dirty="0">
+                <a:solidFill>
+                  <a:schemeClr val="bg1"/>
+                </a:solidFill>
+              </a:rPr>
+              <a:t>Shining in the darkness</a:t>
+            </a:r>
+          </a:p>
+          <a:p>
+            <a:r>
+              <a:rPr lang="en-GB" sz="3600" dirty="0">
+                <a:solidFill>
+                  <a:schemeClr val="bg1"/>
+                </a:solidFill>
+              </a:rPr>
+              <a:t>I will follow You oh</a:t>
+            </a:r>
+          </a:p>
+          <a:p>
+            <a:r>
+              <a:rPr lang="en-GB" sz="3600" dirty="0">
+                <a:solidFill>
+                  <a:schemeClr val="bg1"/>
+                </a:solidFill>
+              </a:rPr>
+              <a:t>My Lighthouse my Lighthouse</a:t>
+            </a:r>
+          </a:p>
+          <a:p>
+            <a:r>
+              <a:rPr lang="en-GB" sz="3600" dirty="0">
+                <a:solidFill>
+                  <a:schemeClr val="bg1"/>
+                </a:solidFill>
+              </a:rPr>
+              <a:t>I will trust the promise</a:t>
+            </a:r>
+          </a:p>
+          <a:p>
+            <a:r>
+              <a:rPr lang="en-GB" sz="3600" dirty="0">
+                <a:solidFill>
+                  <a:schemeClr val="bg1"/>
+                </a:solidFill>
+              </a:rPr>
+              <a:t>You will carry me safe to shore</a:t>
+            </a:r>
+          </a:p>
+          <a:p>
+            <a:r>
+              <a:rPr lang="en-GB" sz="3600" dirty="0">
+                <a:solidFill>
+                  <a:schemeClr val="bg1"/>
+                </a:solidFill>
+              </a:rPr>
+              <a:t>Safe to shore safe to shore safe to shore</a:t>
+            </a:r>
+          </a:p>
+          <a:p>
+            <a:endParaRPr lang="en-GB" sz="3600" dirty="0">
+              <a:solidFill>
+                <a:schemeClr val="bg1"/>
+              </a:solidFill>
+            </a:endParaRPr>
+          </a:p>
+        </p:txBody>
+      </p:sp>
+      <p:sp>
+        <p:nvSpPr>
+          <p:cNvPr id="4" name="TextBox 3">
+            <a:extLst>
+              <a:ext uri="{FF2B5EF4-FFF2-40B4-BE49-F238E27FC236}">
+                <a16:creationId xmlns:a16="http://schemas.microsoft.com/office/drawing/2014/main" id="{4DC81F5E-E020-1B10-B42D-EC085F0A29AD}"/>
+              </a:ext>
+            </a:extLst>
+          </p:cNvPr>
           <p:cNvSpPr txBox="1"/>
           <p:nvPr/>
         </p:nvSpPr>
         <p:spPr>
           <a:xfrm>
-            <a:off x="8529729" y="0"/>
+            <a:off x="8388424" y="-3388"/>
             <a:ext cx="628698" cy="461665"/>
           </a:xfrm>
           <a:prstGeom prst="rect">
@@ -3927,7 +4074,7 @@
                   <a:schemeClr val="bg1"/>
                 </a:solidFill>
               </a:rPr>
-              <a:t>5/5</a:t>
+              <a:t>5/7</a:t>
             </a:r>
           </a:p>
         </p:txBody>
@@ -3935,7 +4082,349 @@
     </p:spTree>
     <p:extLst>
       <p:ext uri="{BB962C8B-B14F-4D97-AF65-F5344CB8AC3E}">
-        <p14:creationId xmlns:p14="http://schemas.microsoft.com/office/powerpoint/2010/main" val="704133499"/>
+        <p14:creationId xmlns:p14="http://schemas.microsoft.com/office/powerpoint/2010/main" val="1831998034"/>
+      </p:ext>
+    </p:extLst>
+  </p:cSld>
+  <p:clrMapOvr>
+    <a:masterClrMapping/>
+  </p:clrMapOvr>
+</p:sld>
+</file>
+
+<file path=ppt/slides/slide7.xml><?xml version="1.0" encoding="utf-8"?>
+<p:sld xmlns:a="http://schemas.openxmlformats.org/drawingml/2006/main" xmlns:r="http://schemas.openxmlformats.org/officeDocument/2006/relationships" xmlns:p="http://schemas.openxmlformats.org/presentationml/2006/main">
+  <p:cSld>
+    <p:spTree>
+      <p:nvGrpSpPr>
+        <p:cNvPr id="1" name="">
+          <a:extLst>
+            <a:ext uri="{FF2B5EF4-FFF2-40B4-BE49-F238E27FC236}">
+              <a16:creationId xmlns:a16="http://schemas.microsoft.com/office/drawing/2014/main" id="{752C5008-CC3C-7C61-59CB-A0EA287509BE}"/>
+            </a:ext>
+          </a:extLst>
+        </p:cNvPr>
+        <p:cNvGrpSpPr/>
+        <p:nvPr/>
+      </p:nvGrpSpPr>
+      <p:grpSpPr>
+        <a:xfrm>
+          <a:off x="0" y="0"/>
+          <a:ext cx="0" cy="0"/>
+          <a:chOff x="0" y="0"/>
+          <a:chExt cx="0" cy="0"/>
+        </a:xfrm>
+      </p:grpSpPr>
+      <p:sp>
+        <p:nvSpPr>
+          <p:cNvPr id="3" name="Subtitle 2">
+            <a:extLst>
+              <a:ext uri="{FF2B5EF4-FFF2-40B4-BE49-F238E27FC236}">
+                <a16:creationId xmlns:a16="http://schemas.microsoft.com/office/drawing/2014/main" id="{7F59428E-1ACB-D0FB-FEB5-D69CBB5C3F26}"/>
+              </a:ext>
+            </a:extLst>
+          </p:cNvPr>
+          <p:cNvSpPr>
+            <a:spLocks noGrp="1"/>
+          </p:cNvSpPr>
+          <p:nvPr>
+            <p:ph type="subTitle" idx="1"/>
+          </p:nvPr>
+        </p:nvSpPr>
+        <p:spPr>
+          <a:xfrm>
+            <a:off x="203118" y="692696"/>
+            <a:ext cx="8640960" cy="6480720"/>
+          </a:xfrm>
+        </p:spPr>
+        <p:txBody>
+          <a:bodyPr>
+            <a:noAutofit/>
+          </a:bodyPr>
+          <a:lstStyle/>
+          <a:p>
+            <a:r>
+              <a:rPr lang="en-GB" sz="3600" dirty="0">
+                <a:solidFill>
+                  <a:schemeClr val="bg1"/>
+                </a:solidFill>
+              </a:rPr>
+              <a:t>Fire before us</a:t>
+            </a:r>
+          </a:p>
+          <a:p>
+            <a:r>
+              <a:rPr lang="en-GB" sz="3600" dirty="0">
+                <a:solidFill>
+                  <a:schemeClr val="bg1"/>
+                </a:solidFill>
+              </a:rPr>
+              <a:t>You're the brightest</a:t>
+            </a:r>
+          </a:p>
+          <a:p>
+            <a:r>
+              <a:rPr lang="en-GB" sz="3600" dirty="0">
+                <a:solidFill>
+                  <a:schemeClr val="bg1"/>
+                </a:solidFill>
+              </a:rPr>
+              <a:t>You will lead us</a:t>
+            </a:r>
+          </a:p>
+          <a:p>
+            <a:r>
+              <a:rPr lang="en-GB" sz="3600" dirty="0">
+                <a:solidFill>
+                  <a:schemeClr val="bg1"/>
+                </a:solidFill>
+              </a:rPr>
+              <a:t>Through the storms </a:t>
+            </a:r>
+          </a:p>
+          <a:p>
+            <a:r>
+              <a:rPr lang="en-GB" sz="3600" dirty="0">
+                <a:solidFill>
+                  <a:schemeClr val="bg1"/>
+                </a:solidFill>
+              </a:rPr>
+              <a:t>(REPEAT)</a:t>
+            </a:r>
+          </a:p>
+          <a:p>
+            <a:endParaRPr lang="en-GB" sz="3600" dirty="0">
+              <a:solidFill>
+                <a:schemeClr val="bg1"/>
+              </a:solidFill>
+            </a:endParaRPr>
+          </a:p>
+        </p:txBody>
+      </p:sp>
+      <p:sp>
+        <p:nvSpPr>
+          <p:cNvPr id="4" name="TextBox 3">
+            <a:extLst>
+              <a:ext uri="{FF2B5EF4-FFF2-40B4-BE49-F238E27FC236}">
+                <a16:creationId xmlns:a16="http://schemas.microsoft.com/office/drawing/2014/main" id="{960EFCC1-FB8E-EFB6-C1F3-1F9B5BC6CA18}"/>
+              </a:ext>
+            </a:extLst>
+          </p:cNvPr>
+          <p:cNvSpPr txBox="1"/>
+          <p:nvPr/>
+        </p:nvSpPr>
+        <p:spPr>
+          <a:xfrm>
+            <a:off x="8388424" y="-3388"/>
+            <a:ext cx="628698" cy="461665"/>
+          </a:xfrm>
+          <a:prstGeom prst="rect">
+            <a:avLst/>
+          </a:prstGeom>
+          <a:noFill/>
+        </p:spPr>
+        <p:txBody>
+          <a:bodyPr wrap="none" rtlCol="0">
+            <a:spAutoFit/>
+          </a:bodyPr>
+          <a:lstStyle/>
+          <a:p>
+            <a:r>
+              <a:rPr lang="en-GB" sz="2400" b="1" dirty="0">
+                <a:solidFill>
+                  <a:schemeClr val="bg1"/>
+                </a:solidFill>
+              </a:rPr>
+              <a:t>6/7</a:t>
+            </a:r>
+          </a:p>
+        </p:txBody>
+      </p:sp>
+    </p:spTree>
+    <p:extLst>
+      <p:ext uri="{BB962C8B-B14F-4D97-AF65-F5344CB8AC3E}">
+        <p14:creationId xmlns:p14="http://schemas.microsoft.com/office/powerpoint/2010/main" val="4032774417"/>
+      </p:ext>
+    </p:extLst>
+  </p:cSld>
+  <p:clrMapOvr>
+    <a:masterClrMapping/>
+  </p:clrMapOvr>
+</p:sld>
+</file>
+
+<file path=ppt/slides/slide8.xml><?xml version="1.0" encoding="utf-8"?>
+<p:sld xmlns:a="http://schemas.openxmlformats.org/drawingml/2006/main" xmlns:r="http://schemas.openxmlformats.org/officeDocument/2006/relationships" xmlns:p="http://schemas.openxmlformats.org/presentationml/2006/main">
+  <p:cSld>
+    <p:spTree>
+      <p:nvGrpSpPr>
+        <p:cNvPr id="1" name="">
+          <a:extLst>
+            <a:ext uri="{FF2B5EF4-FFF2-40B4-BE49-F238E27FC236}">
+              <a16:creationId xmlns:a16="http://schemas.microsoft.com/office/drawing/2014/main" id="{A84CE257-C35B-C776-C9B9-08B5053088FA}"/>
+            </a:ext>
+          </a:extLst>
+        </p:cNvPr>
+        <p:cNvGrpSpPr/>
+        <p:nvPr/>
+      </p:nvGrpSpPr>
+      <p:grpSpPr>
+        <a:xfrm>
+          <a:off x="0" y="0"/>
+          <a:ext cx="0" cy="0"/>
+          <a:chOff x="0" y="0"/>
+          <a:chExt cx="0" cy="0"/>
+        </a:xfrm>
+      </p:grpSpPr>
+      <p:sp>
+        <p:nvSpPr>
+          <p:cNvPr id="3" name="Subtitle 2">
+            <a:extLst>
+              <a:ext uri="{FF2B5EF4-FFF2-40B4-BE49-F238E27FC236}">
+                <a16:creationId xmlns:a16="http://schemas.microsoft.com/office/drawing/2014/main" id="{55868C77-14BC-769B-0662-E2D2A77DA369}"/>
+              </a:ext>
+            </a:extLst>
+          </p:cNvPr>
+          <p:cNvSpPr>
+            <a:spLocks noGrp="1"/>
+          </p:cNvSpPr>
+          <p:nvPr>
+            <p:ph type="subTitle" idx="1"/>
+          </p:nvPr>
+        </p:nvSpPr>
+        <p:spPr>
+          <a:xfrm>
+            <a:off x="203118" y="692696"/>
+            <a:ext cx="8640960" cy="6480720"/>
+          </a:xfrm>
+        </p:spPr>
+        <p:txBody>
+          <a:bodyPr>
+            <a:noAutofit/>
+          </a:bodyPr>
+          <a:lstStyle/>
+          <a:p>
+            <a:r>
+              <a:rPr lang="en-GB" sz="3600" dirty="0">
+                <a:solidFill>
+                  <a:schemeClr val="bg1"/>
+                </a:solidFill>
+              </a:rPr>
+              <a:t>My Lighthouse my Lighthouse</a:t>
+            </a:r>
+          </a:p>
+          <a:p>
+            <a:r>
+              <a:rPr lang="en-GB" sz="3600" dirty="0">
+                <a:solidFill>
+                  <a:schemeClr val="bg1"/>
+                </a:solidFill>
+              </a:rPr>
+              <a:t>Shining in the darkness</a:t>
+            </a:r>
+          </a:p>
+          <a:p>
+            <a:r>
+              <a:rPr lang="en-GB" sz="3600" dirty="0">
+                <a:solidFill>
+                  <a:schemeClr val="bg1"/>
+                </a:solidFill>
+              </a:rPr>
+              <a:t>I will follow You oh</a:t>
+            </a:r>
+          </a:p>
+          <a:p>
+            <a:r>
+              <a:rPr lang="en-GB" sz="3600" dirty="0">
+                <a:solidFill>
+                  <a:schemeClr val="bg1"/>
+                </a:solidFill>
+              </a:rPr>
+              <a:t>My Lighthouse my Lighthouse</a:t>
+            </a:r>
+          </a:p>
+          <a:p>
+            <a:r>
+              <a:rPr lang="en-GB" sz="3600" dirty="0">
+                <a:solidFill>
+                  <a:schemeClr val="bg1"/>
+                </a:solidFill>
+              </a:rPr>
+              <a:t>I will trust the promise</a:t>
+            </a:r>
+          </a:p>
+          <a:p>
+            <a:r>
+              <a:rPr lang="en-GB" sz="3600" dirty="0">
+                <a:solidFill>
+                  <a:schemeClr val="bg1"/>
+                </a:solidFill>
+              </a:rPr>
+              <a:t>You will carry me safe to shore</a:t>
+            </a:r>
+          </a:p>
+          <a:p>
+            <a:r>
+              <a:rPr lang="en-GB" sz="3600" dirty="0">
+                <a:solidFill>
+                  <a:schemeClr val="bg1"/>
+                </a:solidFill>
+              </a:rPr>
+              <a:t>Safe to shore safe to shore safe to shore</a:t>
+            </a:r>
+          </a:p>
+          <a:p>
+            <a:endParaRPr lang="en-GB" sz="3600" dirty="0">
+              <a:solidFill>
+                <a:schemeClr val="bg1"/>
+              </a:solidFill>
+            </a:endParaRPr>
+          </a:p>
+        </p:txBody>
+      </p:sp>
+      <p:sp>
+        <p:nvSpPr>
+          <p:cNvPr id="4" name="TextBox 3">
+            <a:extLst>
+              <a:ext uri="{FF2B5EF4-FFF2-40B4-BE49-F238E27FC236}">
+                <a16:creationId xmlns:a16="http://schemas.microsoft.com/office/drawing/2014/main" id="{5B98EB7D-D303-BC94-6A83-C6A0F942CC72}"/>
+              </a:ext>
+            </a:extLst>
+          </p:cNvPr>
+          <p:cNvSpPr txBox="1"/>
+          <p:nvPr/>
+        </p:nvSpPr>
+        <p:spPr>
+          <a:xfrm>
+            <a:off x="8388424" y="-3388"/>
+            <a:ext cx="628698" cy="461665"/>
+          </a:xfrm>
+          <a:prstGeom prst="rect">
+            <a:avLst/>
+          </a:prstGeom>
+          <a:noFill/>
+        </p:spPr>
+        <p:txBody>
+          <a:bodyPr wrap="none" rtlCol="0">
+            <a:spAutoFit/>
+          </a:bodyPr>
+          <a:lstStyle/>
+          <a:p>
+            <a:r>
+              <a:rPr lang="en-GB" sz="2400" b="1" dirty="0">
+                <a:solidFill>
+                  <a:schemeClr val="bg1"/>
+                </a:solidFill>
+              </a:rPr>
+              <a:t>7/7</a:t>
+            </a:r>
+          </a:p>
+        </p:txBody>
+      </p:sp>
+    </p:spTree>
+    <p:extLst>
+      <p:ext uri="{BB962C8B-B14F-4D97-AF65-F5344CB8AC3E}">
+        <p14:creationId xmlns:p14="http://schemas.microsoft.com/office/powerpoint/2010/main" val="934252531"/>
       </p:ext>
     </p:extLst>
   </p:cSld>
